--- a/report/NYC_Subway_Part1_Delivrable_Report.pptx
+++ b/report/NYC_Subway_Part1_Delivrable_Report.pptx
@@ -2415,7 +2415,7 @@
             </a:r>
             <a:r>
               <a:rPr lang="en-US" sz="1100" dirty="0"/>
-              <a:t>What is the usual ridership in each subway station by hour and day of the week, and by how much does the weather change it?</a:t>
+              <a:t>What is the usual ridership in each area (by subway station) by hour and day of the week, and by how much does the weather change it?</a:t>
             </a:r>
             <a:endParaRPr lang="en-US" sz="1100" b="1" dirty="0"/>
           </a:p>
@@ -9009,7 +9009,7 @@
             </a:r>
             <a:r>
               <a:rPr lang="en-US" sz="1100" dirty="0"/>
-              <a:t>: What is the usual ridership in each subway station by hour and day of the week, and by how much does the weather change it?. </a:t>
+              <a:t>: What is the usual ridership in each area (by subway station) by hour and day of the week, and by how much does the weather change it?. </a:t>
             </a:r>
             <a:r>
               <a:rPr lang="en-US" sz="1100" b="1" dirty="0"/>
@@ -9037,8 +9037,8 @@
         </p:nvSpPr>
         <p:spPr>
           <a:xfrm>
-            <a:off x="184969" y="6853217"/>
-            <a:ext cx="3427363" cy="229396"/>
+            <a:off x="184968" y="6853217"/>
+            <a:ext cx="7315200" cy="229396"/>
           </a:xfrm>
           <a:prstGeom prst="rect">
             <a:avLst/>
@@ -9141,685 +9141,9 @@
             </a:lvl9pPr>
           </a:lstStyle>
           <a:p>
-            <a:pPr marL="342900" indent="-342900">
-              <a:buAutoNum type="arabicPeriod"/>
-            </a:pPr>
-            <a:r>
-              <a:rPr lang="en-US" sz="1400" b="1" dirty="0"/>
-              <a:t>Network-wide effect of weather</a:t>
-            </a:r>
-            <a:endParaRPr lang="en-US" sz="1400" b="1" dirty="0">
-              <a:ea typeface="Calibri"/>
-              <a:cs typeface="Calibri"/>
-            </a:endParaRPr>
-          </a:p>
-        </p:txBody>
-      </p:sp>
-      <p:graphicFrame>
-        <p:nvGraphicFramePr>
-          <p:cNvPr id="20" name="Table 10">
-            <a:extLst>
-              <a:ext uri="{FF2B5EF4-FFF2-40B4-BE49-F238E27FC236}">
-                <a16:creationId xmlns:a16="http://schemas.microsoft.com/office/drawing/2014/main" id="{81949947-C463-96DC-001C-D80E243E7709}"/>
-              </a:ext>
-            </a:extLst>
-          </p:cNvPr>
-          <p:cNvGraphicFramePr>
-            <a:graphicFrameLocks noGrp="1"/>
-          </p:cNvGraphicFramePr>
-          <p:nvPr>
-            <p:extLst>
-              <p:ext uri="{D42A27DB-BD31-4B8C-83A1-F6EECF244321}">
-                <p14:modId xmlns:p14="http://schemas.microsoft.com/office/powerpoint/2010/main" val="236775070"/>
-              </p:ext>
-            </p:extLst>
-          </p:nvPr>
-        </p:nvGraphicFramePr>
-        <p:xfrm>
-          <a:off x="17147" y="7109883"/>
-          <a:ext cx="7510965" cy="1153615"/>
-        </p:xfrm>
-        <a:graphic>
-          <a:graphicData uri="http://schemas.openxmlformats.org/drawingml/2006/table">
-            <a:tbl>
-              <a:tblPr bandRow="1">
-                <a:tableStyleId>{5C22544A-7EE6-4342-B048-85BDC9FD1C3A}</a:tableStyleId>
-              </a:tblPr>
-              <a:tblGrid>
-                <a:gridCol w="2503655">
-                  <a:extLst>
-                    <a:ext uri="{9D8B030D-6E8A-4147-A177-3AD203B41FA5}">
-                      <a16:colId xmlns:a16="http://schemas.microsoft.com/office/drawing/2014/main" val="1114046732"/>
-                    </a:ext>
-                  </a:extLst>
-                </a:gridCol>
-                <a:gridCol w="2503655">
-                  <a:extLst>
-                    <a:ext uri="{9D8B030D-6E8A-4147-A177-3AD203B41FA5}">
-                      <a16:colId xmlns:a16="http://schemas.microsoft.com/office/drawing/2014/main" val="284020454"/>
-                    </a:ext>
-                  </a:extLst>
-                </a:gridCol>
-                <a:gridCol w="2503655">
-                  <a:extLst>
-                    <a:ext uri="{9D8B030D-6E8A-4147-A177-3AD203B41FA5}">
-                      <a16:colId xmlns:a16="http://schemas.microsoft.com/office/drawing/2014/main" val="1105523973"/>
-                    </a:ext>
-                  </a:extLst>
-                </a:gridCol>
-              </a:tblGrid>
-              <a:tr h="376375">
-                <a:tc>
-                  <a:txBody>
-                    <a:bodyPr/>
-                    <a:lstStyle/>
-                    <a:p>
-                      <a:pPr>
-                        <a:buNone/>
-                      </a:pPr>
-                      <a:r>
-                        <a:rPr lang="en-US" sz="1100" b="1" dirty="0"/>
-                        <a:t>Weather condition</a:t>
-                      </a:r>
-                    </a:p>
-                  </a:txBody>
-                  <a:tcPr anchor="ctr">
-                    <a:lnL w="12700">
-                      <a:solidFill>
-                        <a:schemeClr val="tx1"/>
-                      </a:solidFill>
-                    </a:lnL>
-                    <a:lnR w="12700">
-                      <a:solidFill>
-                        <a:schemeClr val="tx1"/>
-                      </a:solidFill>
-                    </a:lnR>
-                    <a:lnT w="12700">
-                      <a:solidFill>
-                        <a:schemeClr val="tx1"/>
-                      </a:solidFill>
-                    </a:lnT>
-                    <a:lnB w="12700">
-                      <a:solidFill>
-                        <a:schemeClr val="tx1"/>
-                      </a:solidFill>
-                    </a:lnB>
-                    <a:noFill/>
-                  </a:tcPr>
-                </a:tc>
-                <a:tc>
-                  <a:txBody>
-                    <a:bodyPr/>
-                    <a:lstStyle/>
-                    <a:p>
-                      <a:pPr>
-                        <a:buNone/>
-                      </a:pPr>
-                      <a:r>
-                        <a:rPr lang="en-US" sz="1100" b="1" dirty="0"/>
-                        <a:t>Hours observed</a:t>
-                      </a:r>
-                    </a:p>
-                  </a:txBody>
-                  <a:tcPr anchor="ctr">
-                    <a:lnL w="12700">
-                      <a:solidFill>
-                        <a:schemeClr val="tx1"/>
-                      </a:solidFill>
-                    </a:lnL>
-                    <a:lnR w="12700">
-                      <a:solidFill>
-                        <a:schemeClr val="tx1"/>
-                      </a:solidFill>
-                    </a:lnR>
-                    <a:lnT w="12700">
-                      <a:solidFill>
-                        <a:schemeClr val="tx1"/>
-                      </a:solidFill>
-                    </a:lnT>
-                    <a:lnB w="12700">
-                      <a:solidFill>
-                        <a:schemeClr val="tx1"/>
-                      </a:solidFill>
-                    </a:lnB>
-                    <a:noFill/>
-                  </a:tcPr>
-                </a:tc>
-                <a:tc>
-                  <a:txBody>
-                    <a:bodyPr/>
-                    <a:lstStyle/>
-                    <a:p>
-                      <a:pPr>
-                        <a:buNone/>
-                      </a:pPr>
-                      <a:r>
-                        <a:rPr lang="en-US" sz="1100" b="1" dirty="0"/>
-                        <a:t>Ridership change vs baseline</a:t>
-                      </a:r>
-                    </a:p>
-                  </a:txBody>
-                  <a:tcPr anchor="ctr">
-                    <a:lnL w="12700">
-                      <a:solidFill>
-                        <a:schemeClr val="tx1"/>
-                      </a:solidFill>
-                    </a:lnL>
-                    <a:lnR w="12700">
-                      <a:solidFill>
-                        <a:schemeClr val="tx1"/>
-                      </a:solidFill>
-                    </a:lnR>
-                    <a:lnT w="12700">
-                      <a:solidFill>
-                        <a:schemeClr val="tx1"/>
-                      </a:solidFill>
-                    </a:lnT>
-                    <a:lnB w="12700">
-                      <a:solidFill>
-                        <a:schemeClr val="tx1"/>
-                      </a:solidFill>
-                    </a:lnB>
-                    <a:noFill/>
-                  </a:tcPr>
-                </a:tc>
-                <a:extLst>
-                  <a:ext uri="{0D108BD9-81ED-4DB2-BD59-A6C34878D82A}">
-                    <a16:rowId xmlns:a16="http://schemas.microsoft.com/office/drawing/2014/main" val="49033072"/>
-                  </a:ext>
-                </a:extLst>
-              </a:tr>
-              <a:tr h="228513">
-                <a:tc>
-                  <a:txBody>
-                    <a:bodyPr/>
-                    <a:lstStyle/>
-                    <a:p>
-                      <a:pPr>
-                        <a:buNone/>
-                      </a:pPr>
-                      <a:r>
-                        <a:rPr lang="en-US" sz="1100"/>
-                        <a:t>Light rain</a:t>
-                      </a:r>
-                    </a:p>
-                  </a:txBody>
-                  <a:tcPr anchor="ctr">
-                    <a:lnL w="12700">
-                      <a:solidFill>
-                        <a:schemeClr val="tx1"/>
-                      </a:solidFill>
-                    </a:lnL>
-                    <a:lnR w="12700">
-                      <a:solidFill>
-                        <a:schemeClr val="tx1"/>
-                      </a:solidFill>
-                    </a:lnR>
-                    <a:lnT w="12700">
-                      <a:solidFill>
-                        <a:schemeClr val="tx1"/>
-                      </a:solidFill>
-                    </a:lnT>
-                    <a:lnB w="12700">
-                      <a:solidFill>
-                        <a:schemeClr val="tx1"/>
-                      </a:solidFill>
-                    </a:lnB>
-                    <a:noFill/>
-                  </a:tcPr>
-                </a:tc>
-                <a:tc>
-                  <a:txBody>
-                    <a:bodyPr/>
-                    <a:lstStyle/>
-                    <a:p>
-                      <a:pPr>
-                        <a:buNone/>
-                      </a:pPr>
-                      <a:r>
-                        <a:rPr lang="en-US" sz="1100"/>
-                        <a:t>454</a:t>
-                      </a:r>
-                    </a:p>
-                  </a:txBody>
-                  <a:tcPr anchor="ctr">
-                    <a:lnL w="12700">
-                      <a:solidFill>
-                        <a:schemeClr val="tx1"/>
-                      </a:solidFill>
-                    </a:lnL>
-                    <a:lnR w="12700">
-                      <a:solidFill>
-                        <a:schemeClr val="tx1"/>
-                      </a:solidFill>
-                    </a:lnR>
-                    <a:lnT w="12700">
-                      <a:solidFill>
-                        <a:schemeClr val="tx1"/>
-                      </a:solidFill>
-                    </a:lnT>
-                    <a:lnB w="12700">
-                      <a:solidFill>
-                        <a:schemeClr val="tx1"/>
-                      </a:solidFill>
-                    </a:lnB>
-                    <a:noFill/>
-                  </a:tcPr>
-                </a:tc>
-                <a:tc>
-                  <a:txBody>
-                    <a:bodyPr/>
-                    <a:lstStyle/>
-                    <a:p>
-                      <a:pPr>
-                        <a:buNone/>
-                      </a:pPr>
-                      <a:r>
-                        <a:rPr lang="en-US" sz="1100" dirty="0"/>
-                        <a:t>−2.0%</a:t>
-                      </a:r>
-                    </a:p>
-                  </a:txBody>
-                  <a:tcPr anchor="ctr">
-                    <a:lnL w="12700">
-                      <a:solidFill>
-                        <a:schemeClr val="tx1"/>
-                      </a:solidFill>
-                    </a:lnL>
-                    <a:lnR w="12700">
-                      <a:solidFill>
-                        <a:schemeClr val="tx1"/>
-                      </a:solidFill>
-                    </a:lnR>
-                    <a:lnT w="12700">
-                      <a:solidFill>
-                        <a:schemeClr val="tx1"/>
-                      </a:solidFill>
-                    </a:lnT>
-                    <a:lnB w="12700">
-                      <a:solidFill>
-                        <a:schemeClr val="tx1"/>
-                      </a:solidFill>
-                    </a:lnB>
-                    <a:noFill/>
-                  </a:tcPr>
-                </a:tc>
-                <a:extLst>
-                  <a:ext uri="{0D108BD9-81ED-4DB2-BD59-A6C34878D82A}">
-                    <a16:rowId xmlns:a16="http://schemas.microsoft.com/office/drawing/2014/main" val="442269309"/>
-                  </a:ext>
-                </a:extLst>
-              </a:tr>
-              <a:tr h="228513">
-                <a:tc>
-                  <a:txBody>
-                    <a:bodyPr/>
-                    <a:lstStyle/>
-                    <a:p>
-                      <a:pPr>
-                        <a:buNone/>
-                      </a:pPr>
-                      <a:r>
-                        <a:rPr lang="en-US" sz="1100"/>
-                        <a:t>Heavy rain</a:t>
-                      </a:r>
-                    </a:p>
-                  </a:txBody>
-                  <a:tcPr anchor="ctr">
-                    <a:lnL w="12700">
-                      <a:solidFill>
-                        <a:schemeClr val="tx1"/>
-                      </a:solidFill>
-                    </a:lnL>
-                    <a:lnR w="12700">
-                      <a:solidFill>
-                        <a:schemeClr val="tx1"/>
-                      </a:solidFill>
-                    </a:lnR>
-                    <a:lnT w="12700">
-                      <a:solidFill>
-                        <a:schemeClr val="tx1"/>
-                      </a:solidFill>
-                    </a:lnT>
-                    <a:lnB w="12700">
-                      <a:solidFill>
-                        <a:schemeClr val="tx1"/>
-                      </a:solidFill>
-                    </a:lnB>
-                    <a:noFill/>
-                  </a:tcPr>
-                </a:tc>
-                <a:tc>
-                  <a:txBody>
-                    <a:bodyPr/>
-                    <a:lstStyle/>
-                    <a:p>
-                      <a:pPr>
-                        <a:buNone/>
-                      </a:pPr>
-                      <a:r>
-                        <a:rPr lang="en-US" sz="1100"/>
-                        <a:t>110</a:t>
-                      </a:r>
-                    </a:p>
-                  </a:txBody>
-                  <a:tcPr anchor="ctr">
-                    <a:lnL w="12700">
-                      <a:solidFill>
-                        <a:schemeClr val="tx1"/>
-                      </a:solidFill>
-                    </a:lnL>
-                    <a:lnR w="12700">
-                      <a:solidFill>
-                        <a:schemeClr val="tx1"/>
-                      </a:solidFill>
-                    </a:lnR>
-                    <a:lnT w="12700">
-                      <a:solidFill>
-                        <a:schemeClr val="tx1"/>
-                      </a:solidFill>
-                    </a:lnT>
-                    <a:lnB w="12700">
-                      <a:solidFill>
-                        <a:schemeClr val="tx1"/>
-                      </a:solidFill>
-                    </a:lnB>
-                    <a:noFill/>
-                  </a:tcPr>
-                </a:tc>
-                <a:tc>
-                  <a:txBody>
-                    <a:bodyPr/>
-                    <a:lstStyle/>
-                    <a:p>
-                      <a:pPr>
-                        <a:buNone/>
-                      </a:pPr>
-                      <a:r>
-                        <a:rPr lang="en-US" sz="1100" dirty="0"/>
-                        <a:t>−1.0%</a:t>
-                      </a:r>
-                    </a:p>
-                  </a:txBody>
-                  <a:tcPr anchor="ctr">
-                    <a:lnL w="12700">
-                      <a:solidFill>
-                        <a:schemeClr val="tx1"/>
-                      </a:solidFill>
-                    </a:lnL>
-                    <a:lnR w="12700">
-                      <a:solidFill>
-                        <a:schemeClr val="tx1"/>
-                      </a:solidFill>
-                    </a:lnR>
-                    <a:lnT w="12700">
-                      <a:solidFill>
-                        <a:schemeClr val="tx1"/>
-                      </a:solidFill>
-                    </a:lnT>
-                    <a:lnB w="12700">
-                      <a:solidFill>
-                        <a:schemeClr val="tx1"/>
-                      </a:solidFill>
-                    </a:lnB>
-                    <a:noFill/>
-                  </a:tcPr>
-                </a:tc>
-                <a:extLst>
-                  <a:ext uri="{0D108BD9-81ED-4DB2-BD59-A6C34878D82A}">
-                    <a16:rowId xmlns:a16="http://schemas.microsoft.com/office/drawing/2014/main" val="4271105988"/>
-                  </a:ext>
-                </a:extLst>
-              </a:tr>
-              <a:tr h="228513">
-                <a:tc>
-                  <a:txBody>
-                    <a:bodyPr/>
-                    <a:lstStyle/>
-                    <a:p>
-                      <a:pPr>
-                        <a:buNone/>
-                      </a:pPr>
-                      <a:r>
-                        <a:rPr lang="en-US" sz="1100" dirty="0"/>
-                        <a:t>Snow</a:t>
-                      </a:r>
-                    </a:p>
-                  </a:txBody>
-                  <a:tcPr anchor="ctr">
-                    <a:lnL w="12700">
-                      <a:solidFill>
-                        <a:schemeClr val="tx1"/>
-                      </a:solidFill>
-                    </a:lnL>
-                    <a:lnR w="12700">
-                      <a:solidFill>
-                        <a:schemeClr val="tx1"/>
-                      </a:solidFill>
-                    </a:lnR>
-                    <a:lnT w="12700">
-                      <a:solidFill>
-                        <a:schemeClr val="tx1"/>
-                      </a:solidFill>
-                    </a:lnT>
-                    <a:lnB w="12700">
-                      <a:solidFill>
-                        <a:schemeClr val="tx1"/>
-                      </a:solidFill>
-                    </a:lnB>
-                    <a:noFill/>
-                  </a:tcPr>
-                </a:tc>
-                <a:tc>
-                  <a:txBody>
-                    <a:bodyPr/>
-                    <a:lstStyle/>
-                    <a:p>
-                      <a:pPr>
-                        <a:buNone/>
-                      </a:pPr>
-                      <a:r>
-                        <a:rPr lang="en-US" sz="1100" dirty="0"/>
-                        <a:t>64</a:t>
-                      </a:r>
-                    </a:p>
-                  </a:txBody>
-                  <a:tcPr anchor="ctr">
-                    <a:lnL w="12700">
-                      <a:solidFill>
-                        <a:schemeClr val="tx1"/>
-                      </a:solidFill>
-                    </a:lnL>
-                    <a:lnR w="12700">
-                      <a:solidFill>
-                        <a:schemeClr val="tx1"/>
-                      </a:solidFill>
-                    </a:lnR>
-                    <a:lnT w="12700">
-                      <a:solidFill>
-                        <a:schemeClr val="tx1"/>
-                      </a:solidFill>
-                    </a:lnT>
-                    <a:lnB w="12700">
-                      <a:solidFill>
-                        <a:schemeClr val="tx1"/>
-                      </a:solidFill>
-                    </a:lnB>
-                    <a:noFill/>
-                  </a:tcPr>
-                </a:tc>
-                <a:tc>
-                  <a:txBody>
-                    <a:bodyPr/>
-                    <a:lstStyle/>
-                    <a:p>
-                      <a:pPr>
-                        <a:buNone/>
-                      </a:pPr>
-                      <a:r>
-                        <a:rPr lang="en-US" sz="1100" dirty="0"/>
-                        <a:t>−4.8%</a:t>
-                      </a:r>
-                    </a:p>
-                  </a:txBody>
-                  <a:tcPr anchor="ctr">
-                    <a:lnL w="12700">
-                      <a:solidFill>
-                        <a:schemeClr val="tx1"/>
-                      </a:solidFill>
-                    </a:lnL>
-                    <a:lnR w="12700">
-                      <a:solidFill>
-                        <a:schemeClr val="tx1"/>
-                      </a:solidFill>
-                    </a:lnR>
-                    <a:lnT w="12700">
-                      <a:solidFill>
-                        <a:schemeClr val="tx1"/>
-                      </a:solidFill>
-                    </a:lnT>
-                    <a:lnB w="12700">
-                      <a:solidFill>
-                        <a:schemeClr val="tx1"/>
-                      </a:solidFill>
-                    </a:lnB>
-                    <a:noFill/>
-                  </a:tcPr>
-                </a:tc>
-                <a:extLst>
-                  <a:ext uri="{0D108BD9-81ED-4DB2-BD59-A6C34878D82A}">
-                    <a16:rowId xmlns:a16="http://schemas.microsoft.com/office/drawing/2014/main" val="2094425736"/>
-                  </a:ext>
-                </a:extLst>
-              </a:tr>
-            </a:tbl>
-          </a:graphicData>
-        </a:graphic>
-      </p:graphicFrame>
-      <p:sp>
-        <p:nvSpPr>
-          <p:cNvPr id="25" name="Text 10">
-            <a:extLst>
-              <a:ext uri="{FF2B5EF4-FFF2-40B4-BE49-F238E27FC236}">
-                <a16:creationId xmlns:a16="http://schemas.microsoft.com/office/drawing/2014/main" id="{88A8D3D6-834D-8702-7FED-3A50F7253988}"/>
-              </a:ext>
-            </a:extLst>
-          </p:cNvPr>
-          <p:cNvSpPr txBox="1"/>
-          <p:nvPr/>
-        </p:nvSpPr>
-        <p:spPr>
-          <a:xfrm>
-            <a:off x="184969" y="8511665"/>
-            <a:ext cx="2977734" cy="252297"/>
-          </a:xfrm>
-          <a:prstGeom prst="rect">
-            <a:avLst/>
-          </a:prstGeom>
-          <a:noFill/>
-          <a:ln/>
-        </p:spPr>
-        <p:txBody>
-          <a:bodyPr wrap="square" lIns="0" tIns="0" rIns="0" bIns="0" rtlCol="0" anchor="ctr"/>
-          <a:lstStyle>
-            <a:lvl1pPr marL="0" algn="l" defTabSz="914400" rtl="0" eaLnBrk="1" latinLnBrk="0" hangingPunct="1">
-              <a:defRPr sz="1800" kern="1200">
-                <a:solidFill>
-                  <a:schemeClr val="tx1"/>
-                </a:solidFill>
-                <a:latin typeface="+mn-lt"/>
-                <a:ea typeface="+mn-ea"/>
-                <a:cs typeface="+mn-cs"/>
-              </a:defRPr>
-            </a:lvl1pPr>
-            <a:lvl2pPr marL="457200" algn="l" defTabSz="914400" rtl="0" eaLnBrk="1" latinLnBrk="0" hangingPunct="1">
-              <a:defRPr sz="1800" kern="1200">
-                <a:solidFill>
-                  <a:schemeClr val="tx1"/>
-                </a:solidFill>
-                <a:latin typeface="+mn-lt"/>
-                <a:ea typeface="+mn-ea"/>
-                <a:cs typeface="+mn-cs"/>
-              </a:defRPr>
-            </a:lvl2pPr>
-            <a:lvl3pPr marL="914400" algn="l" defTabSz="914400" rtl="0" eaLnBrk="1" latinLnBrk="0" hangingPunct="1">
-              <a:defRPr sz="1800" kern="1200">
-                <a:solidFill>
-                  <a:schemeClr val="tx1"/>
-                </a:solidFill>
-                <a:latin typeface="+mn-lt"/>
-                <a:ea typeface="+mn-ea"/>
-                <a:cs typeface="+mn-cs"/>
-              </a:defRPr>
-            </a:lvl3pPr>
-            <a:lvl4pPr marL="1371600" algn="l" defTabSz="914400" rtl="0" eaLnBrk="1" latinLnBrk="0" hangingPunct="1">
-              <a:defRPr sz="1800" kern="1200">
-                <a:solidFill>
-                  <a:schemeClr val="tx1"/>
-                </a:solidFill>
-                <a:latin typeface="+mn-lt"/>
-                <a:ea typeface="+mn-ea"/>
-                <a:cs typeface="+mn-cs"/>
-              </a:defRPr>
-            </a:lvl4pPr>
-            <a:lvl5pPr marL="1828800" algn="l" defTabSz="914400" rtl="0" eaLnBrk="1" latinLnBrk="0" hangingPunct="1">
-              <a:defRPr sz="1800" kern="1200">
-                <a:solidFill>
-                  <a:schemeClr val="tx1"/>
-                </a:solidFill>
-                <a:latin typeface="+mn-lt"/>
-                <a:ea typeface="+mn-ea"/>
-                <a:cs typeface="+mn-cs"/>
-              </a:defRPr>
-            </a:lvl5pPr>
-            <a:lvl6pPr marL="2286000" algn="l" defTabSz="914400" rtl="0" eaLnBrk="1" latinLnBrk="0" hangingPunct="1">
-              <a:defRPr sz="1800" kern="1200">
-                <a:solidFill>
-                  <a:schemeClr val="tx1"/>
-                </a:solidFill>
-                <a:latin typeface="+mn-lt"/>
-                <a:ea typeface="+mn-ea"/>
-                <a:cs typeface="+mn-cs"/>
-              </a:defRPr>
-            </a:lvl6pPr>
-            <a:lvl7pPr marL="2743200" algn="l" defTabSz="914400" rtl="0" eaLnBrk="1" latinLnBrk="0" hangingPunct="1">
-              <a:defRPr sz="1800" kern="1200">
-                <a:solidFill>
-                  <a:schemeClr val="tx1"/>
-                </a:solidFill>
-                <a:latin typeface="+mn-lt"/>
-                <a:ea typeface="+mn-ea"/>
-                <a:cs typeface="+mn-cs"/>
-              </a:defRPr>
-            </a:lvl7pPr>
-            <a:lvl8pPr marL="3200400" algn="l" defTabSz="914400" rtl="0" eaLnBrk="1" latinLnBrk="0" hangingPunct="1">
-              <a:defRPr sz="1800" kern="1200">
-                <a:solidFill>
-                  <a:schemeClr val="tx1"/>
-                </a:solidFill>
-                <a:latin typeface="+mn-lt"/>
-                <a:ea typeface="+mn-ea"/>
-                <a:cs typeface="+mn-cs"/>
-              </a:defRPr>
-            </a:lvl8pPr>
-            <a:lvl9pPr marL="3657600" algn="l" defTabSz="914400" rtl="0" eaLnBrk="1" latinLnBrk="0" hangingPunct="1">
-              <a:defRPr sz="1800" kern="1200">
-                <a:solidFill>
-                  <a:schemeClr val="tx1"/>
-                </a:solidFill>
-                <a:latin typeface="+mn-lt"/>
-                <a:ea typeface="+mn-ea"/>
-                <a:cs typeface="+mn-cs"/>
-              </a:defRPr>
-            </a:lvl9pPr>
-          </a:lstStyle>
-          <a:p>
-            <a:r>
-              <a:rPr lang="en-US" sz="1400" b="1" dirty="0">
-                <a:ea typeface="+mn-lt"/>
-                <a:cs typeface="+mn-lt"/>
-              </a:rPr>
-              <a:t>2.       Differences between boroughs</a:t>
+            <a:r>
+              <a:rPr lang="en-US" sz="1400" b="1"/>
+              <a:t>Usual ridership and effect of the weather (change vs. comparable dry hours)</a:t>
             </a:r>
             <a:endParaRPr lang="en-US" sz="1400" b="1" dirty="0">
               <a:ea typeface="Calibri"/>
@@ -9843,14 +9167,14 @@
           <p:nvPr>
             <p:extLst>
               <p:ext uri="{D42A27DB-BD31-4B8C-83A1-F6EECF244321}">
-                <p14:modId xmlns:p14="http://schemas.microsoft.com/office/powerpoint/2010/main" val="2276081598"/>
+                <p14:modId xmlns:p14="http://schemas.microsoft.com/office/powerpoint/2010/main" val="2849285276"/>
               </p:ext>
             </p:extLst>
           </p:nvPr>
         </p:nvGraphicFramePr>
         <p:xfrm>
-          <a:off x="17147" y="8763830"/>
-          <a:ext cx="7510968" cy="1295400"/>
+          <a:off x="17147" y="7109460"/>
+          <a:ext cx="7510780" cy="1722120"/>
         </p:xfrm>
         <a:graphic>
           <a:graphicData uri="http://schemas.openxmlformats.org/drawingml/2006/table">
@@ -9859,31 +9183,45 @@
                 <a:tableStyleId>{5C22544A-7EE6-4342-B048-85BDC9FD1C3A}</a:tableStyleId>
               </a:tblPr>
               <a:tblGrid>
-                <a:gridCol w="1877742">
+                <a:gridCol w="1092200">
                   <a:extLst>
                     <a:ext uri="{9D8B030D-6E8A-4147-A177-3AD203B41FA5}">
                       <a16:colId xmlns:a16="http://schemas.microsoft.com/office/drawing/2014/main" val="129859399"/>
                     </a:ext>
                   </a:extLst>
                 </a:gridCol>
-                <a:gridCol w="1877742">
+                <a:gridCol w="1219200">
                   <a:extLst>
                     <a:ext uri="{9D8B030D-6E8A-4147-A177-3AD203B41FA5}">
                       <a16:colId xmlns:a16="http://schemas.microsoft.com/office/drawing/2014/main" val="4230606441"/>
                     </a:ext>
                   </a:extLst>
                 </a:gridCol>
-                <a:gridCol w="1877742">
+                <a:gridCol w="2235200">
                   <a:extLst>
                     <a:ext uri="{9D8B030D-6E8A-4147-A177-3AD203B41FA5}">
                       <a16:colId xmlns:a16="http://schemas.microsoft.com/office/drawing/2014/main" val="389008135"/>
                     </a:ext>
                   </a:extLst>
                 </a:gridCol>
-                <a:gridCol w="1877742">
+                <a:gridCol w="952500">
                   <a:extLst>
                     <a:ext uri="{9D8B030D-6E8A-4147-A177-3AD203B41FA5}">
                       <a16:colId xmlns:a16="http://schemas.microsoft.com/office/drawing/2014/main" val="2395327052"/>
+                    </a:ext>
+                  </a:extLst>
+                </a:gridCol>
+                <a:gridCol w="965200">
+                  <a:extLst>
+                    <a:ext uri="{9D8B030D-6E8A-4147-A177-3AD203B41FA5}">
+                      <a16:colId xmlns:a16="http://schemas.microsoft.com/office/drawing/2014/main" val="893712690"/>
+                    </a:ext>
+                  </a:extLst>
+                </a:gridCol>
+                <a:gridCol w="1046480">
+                  <a:extLst>
+                    <a:ext uri="{9D8B030D-6E8A-4147-A177-3AD203B41FA5}">
+                      <a16:colId xmlns:a16="http://schemas.microsoft.com/office/drawing/2014/main" val="2546980700"/>
                     </a:ext>
                   </a:extLst>
                 </a:gridCol>
@@ -9898,9 +9236,14 @@
                         <a:buNone/>
                       </a:pPr>
                       <a:r>
-                        <a:rPr lang="en-US" sz="1100" b="1" dirty="0"/>
-                        <a:t>Borough</a:t>
-                      </a:r>
+                        <a:rPr lang="en-US" sz="1100" b="1">
+                          <a:latin typeface="Calibri" panose="020F0502020204030204" pitchFamily="34" charset="0"/>
+                        </a:rPr>
+                        <a:t>Area</a:t>
+                      </a:r>
+                      <a:endParaRPr lang="en-US" sz="1100" b="1" dirty="0">
+                        <a:latin typeface="Calibri" panose="020F0502020204030204" pitchFamily="34" charset="0"/>
+                      </a:endParaRPr>
                     </a:p>
                   </a:txBody>
                   <a:tcPr anchor="ctr">
@@ -9936,8 +9279,10 @@
                         <a:buNone/>
                       </a:pPr>
                       <a:r>
-                        <a:rPr lang="en-US" sz="1100" b="1"/>
-                        <a:t>Light rain</a:t>
+                        <a:rPr lang="en-US" sz="1100" b="1">
+                          <a:latin typeface="Calibri" panose="020F0502020204030204" pitchFamily="34" charset="0"/>
+                        </a:rPr>
+                        <a:t>Usual riders per day</a:t>
                       </a:r>
                     </a:p>
                   </a:txBody>
@@ -9974,8 +9319,10 @@
                         <a:buNone/>
                       </a:pPr>
                       <a:r>
-                        <a:rPr lang="en-US" sz="1100" b="1"/>
-                        <a:t>Heavy rain</a:t>
+                        <a:rPr lang="en-US" sz="1100" b="1">
+                          <a:latin typeface="Calibri" panose="020F0502020204030204" pitchFamily="34" charset="0"/>
+                        </a:rPr>
+                        <a:t>Busiest station (riders per day)</a:t>
                       </a:r>
                     </a:p>
                   </a:txBody>
@@ -10012,8 +9359,10 @@
                         <a:buNone/>
                       </a:pPr>
                       <a:r>
-                        <a:rPr lang="en-US" sz="1100" b="1"/>
-                        <a:t>Snow</a:t>
+                        <a:rPr lang="en-US" sz="1100" b="1">
+                          <a:latin typeface="Calibri" panose="020F0502020204030204" pitchFamily="34" charset="0"/>
+                        </a:rPr>
+                        <a:t>Light rain</a:t>
                       </a:r>
                     </a:p>
                   </a:txBody>
@@ -10023,10 +9372,14 @@
                         <a:schemeClr val="tx1"/>
                       </a:solidFill>
                     </a:lnL>
-                    <a:lnR w="12700">
-                      <a:solidFill>
-                        <a:schemeClr val="tx1"/>
-                      </a:solidFill>
+                    <a:lnR w="12700" cap="flat" cmpd="sng" algn="ctr">
+                      <a:solidFill>
+                        <a:schemeClr val="tx1"/>
+                      </a:solidFill>
+                      <a:prstDash val="solid"/>
+                      <a:round/>
+                      <a:headEnd type="none" w="med" len="med"/>
+                      <a:tailEnd type="none" w="med" len="med"/>
                     </a:lnR>
                     <a:lnT w="12700">
                       <a:solidFill>
@@ -10037,6 +9390,98 @@
                       <a:solidFill>
                         <a:schemeClr val="tx1"/>
                       </a:solidFill>
+                    </a:lnB>
+                    <a:noFill/>
+                  </a:tcPr>
+                </a:tc>
+                <a:tc>
+                  <a:txBody>
+                    <a:bodyPr/>
+                    <a:lstStyle/>
+                    <a:p>
+                      <a:pPr>
+                        <a:buNone/>
+                      </a:pPr>
+                      <a:r>
+                        <a:rPr lang="en-US" sz="1100" b="1">
+                          <a:latin typeface="Calibri" panose="020F0502020204030204" pitchFamily="34" charset="0"/>
+                        </a:rPr>
+                        <a:t>Heavy rain</a:t>
+                      </a:r>
+                    </a:p>
+                  </a:txBody>
+                  <a:tcPr anchor="ctr">
+                    <a:lnL w="12700">
+                      <a:solidFill>
+                        <a:schemeClr val="tx1"/>
+                      </a:solidFill>
+                    </a:lnL>
+                    <a:lnR w="12700" cap="flat" cmpd="sng" algn="ctr">
+                      <a:solidFill>
+                        <a:schemeClr val="tx1"/>
+                      </a:solidFill>
+                      <a:prstDash val="solid"/>
+                      <a:round/>
+                      <a:headEnd type="none" w="med" len="med"/>
+                      <a:tailEnd type="none" w="med" len="med"/>
+                    </a:lnR>
+                    <a:lnT w="12700">
+                      <a:solidFill>
+                        <a:schemeClr val="tx1"/>
+                      </a:solidFill>
+                    </a:lnT>
+                    <a:lnB w="12700" cap="flat" cmpd="sng" algn="ctr">
+                      <a:solidFill>
+                        <a:schemeClr val="tx1"/>
+                      </a:solidFill>
+                      <a:prstDash val="solid"/>
+                      <a:round/>
+                      <a:headEnd type="none" w="med" len="med"/>
+                      <a:tailEnd type="none" w="med" len="med"/>
+                    </a:lnB>
+                    <a:noFill/>
+                  </a:tcPr>
+                </a:tc>
+                <a:tc>
+                  <a:txBody>
+                    <a:bodyPr/>
+                    <a:lstStyle/>
+                    <a:p>
+                      <a:pPr>
+                        <a:buNone/>
+                      </a:pPr>
+                      <a:r>
+                        <a:rPr lang="en-US" sz="1100" b="1">
+                          <a:latin typeface="Calibri" panose="020F0502020204030204" pitchFamily="34" charset="0"/>
+                        </a:rPr>
+                        <a:t>Snow</a:t>
+                      </a:r>
+                    </a:p>
+                  </a:txBody>
+                  <a:tcPr anchor="ctr">
+                    <a:lnL w="12700">
+                      <a:solidFill>
+                        <a:schemeClr val="tx1"/>
+                      </a:solidFill>
+                    </a:lnL>
+                    <a:lnR w="12700">
+                      <a:solidFill>
+                        <a:schemeClr val="tx1"/>
+                      </a:solidFill>
+                    </a:lnR>
+                    <a:lnT w="12700">
+                      <a:solidFill>
+                        <a:schemeClr val="tx1"/>
+                      </a:solidFill>
+                    </a:lnT>
+                    <a:lnB w="12700" cap="flat" cmpd="sng" algn="ctr">
+                      <a:solidFill>
+                        <a:schemeClr val="tx1"/>
+                      </a:solidFill>
+                      <a:prstDash val="solid"/>
+                      <a:round/>
+                      <a:headEnd type="none" w="med" len="med"/>
+                      <a:tailEnd type="none" w="med" len="med"/>
                     </a:lnB>
                     <a:noFill/>
                   </a:tcPr>
@@ -10057,9 +9502,14 @@
                         <a:buNone/>
                       </a:pPr>
                       <a:r>
-                        <a:rPr lang="en-US" sz="1100" dirty="0"/>
-                        <a:t>Bronx</a:t>
-                      </a:r>
+                        <a:rPr lang="en-US" sz="1100" b="1">
+                          <a:latin typeface="Calibri" panose="020F0502020204030204" pitchFamily="34" charset="0"/>
+                        </a:rPr>
+                        <a:t>Whole network</a:t>
+                      </a:r>
+                      <a:endParaRPr lang="en-US" sz="1100" b="1" dirty="0">
+                        <a:latin typeface="Calibri" panose="020F0502020204030204" pitchFamily="34" charset="0"/>
+                      </a:endParaRPr>
                     </a:p>
                   </a:txBody>
                   <a:tcPr anchor="ctr">
@@ -10068,20 +9518,28 @@
                         <a:schemeClr val="tx1"/>
                       </a:solidFill>
                     </a:lnL>
-                    <a:lnR w="12700">
-                      <a:solidFill>
-                        <a:schemeClr val="tx1"/>
-                      </a:solidFill>
+                    <a:lnR w="12700" cap="flat" cmpd="sng" algn="ctr">
+                      <a:solidFill>
+                        <a:schemeClr val="tx1"/>
+                      </a:solidFill>
+                      <a:prstDash val="solid"/>
+                      <a:round/>
+                      <a:headEnd type="none" w="med" len="med"/>
+                      <a:tailEnd type="none" w="med" len="med"/>
                     </a:lnR>
                     <a:lnT w="12700">
                       <a:solidFill>
                         <a:schemeClr val="tx1"/>
                       </a:solidFill>
                     </a:lnT>
-                    <a:lnB w="12700">
-                      <a:solidFill>
-                        <a:schemeClr val="tx1"/>
-                      </a:solidFill>
+                    <a:lnB w="12700" cap="flat" cmpd="sng" algn="ctr">
+                      <a:solidFill>
+                        <a:schemeClr val="tx1"/>
+                      </a:solidFill>
+                      <a:prstDash val="solid"/>
+                      <a:round/>
+                      <a:headEnd type="none" w="med" len="med"/>
+                      <a:tailEnd type="none" w="med" len="med"/>
                     </a:lnB>
                     <a:noFill/>
                   </a:tcPr>
@@ -10095,31 +9553,48 @@
                         <a:buNone/>
                       </a:pPr>
                       <a:r>
-                        <a:rPr lang="en-US" sz="1100" dirty="0"/>
-                        <a:t>−3.7%</a:t>
-                      </a:r>
+                        <a:rPr lang="en-US" sz="1100" b="1">
+                          <a:latin typeface="Calibri" panose="020F0502020204030204" pitchFamily="34" charset="0"/>
+                        </a:rPr>
+                        <a:t>3,437,236</a:t>
+                      </a:r>
+                      <a:endParaRPr lang="en-US" sz="1100" b="1" dirty="0">
+                        <a:latin typeface="Calibri" panose="020F0502020204030204" pitchFamily="34" charset="0"/>
+                      </a:endParaRPr>
                     </a:p>
                   </a:txBody>
                   <a:tcPr anchor="ctr">
-                    <a:lnL w="12700">
-                      <a:solidFill>
-                        <a:schemeClr val="tx1"/>
-                      </a:solidFill>
+                    <a:lnL w="12700" cap="flat" cmpd="sng" algn="ctr">
+                      <a:solidFill>
+                        <a:schemeClr val="tx1"/>
+                      </a:solidFill>
+                      <a:prstDash val="solid"/>
+                      <a:round/>
+                      <a:headEnd type="none" w="med" len="med"/>
+                      <a:tailEnd type="none" w="med" len="med"/>
                     </a:lnL>
-                    <a:lnR w="12700">
-                      <a:solidFill>
-                        <a:schemeClr val="tx1"/>
-                      </a:solidFill>
+                    <a:lnR w="12700" cap="flat" cmpd="sng" algn="ctr">
+                      <a:solidFill>
+                        <a:schemeClr val="tx1"/>
+                      </a:solidFill>
+                      <a:prstDash val="solid"/>
+                      <a:round/>
+                      <a:headEnd type="none" w="med" len="med"/>
+                      <a:tailEnd type="none" w="med" len="med"/>
                     </a:lnR>
                     <a:lnT w="12700">
                       <a:solidFill>
                         <a:schemeClr val="tx1"/>
                       </a:solidFill>
                     </a:lnT>
-                    <a:lnB w="12700">
-                      <a:solidFill>
-                        <a:schemeClr val="tx1"/>
-                      </a:solidFill>
+                    <a:lnB w="12700" cap="flat" cmpd="sng" algn="ctr">
+                      <a:solidFill>
+                        <a:schemeClr val="tx1"/>
+                      </a:solidFill>
+                      <a:prstDash val="solid"/>
+                      <a:round/>
+                      <a:headEnd type="none" w="med" len="med"/>
+                      <a:tailEnd type="none" w="med" len="med"/>
                     </a:lnB>
                     <a:noFill/>
                   </a:tcPr>
@@ -10133,31 +9608,45 @@
                         <a:buNone/>
                       </a:pPr>
                       <a:r>
-                        <a:rPr lang="en-US" sz="1100"/>
-                        <a:t>−10.3%</a:t>
+                        <a:rPr lang="en-US" sz="1100" b="1">
+                          <a:latin typeface="Calibri" panose="020F0502020204030204" pitchFamily="34" charset="0"/>
+                        </a:rPr>
+                        <a:t>Times Sq-42 St (129,777)</a:t>
                       </a:r>
                     </a:p>
                   </a:txBody>
                   <a:tcPr anchor="ctr">
-                    <a:lnL w="12700">
-                      <a:solidFill>
-                        <a:schemeClr val="tx1"/>
-                      </a:solidFill>
+                    <a:lnL w="12700" cap="flat" cmpd="sng" algn="ctr">
+                      <a:solidFill>
+                        <a:schemeClr val="tx1"/>
+                      </a:solidFill>
+                      <a:prstDash val="solid"/>
+                      <a:round/>
+                      <a:headEnd type="none" w="med" len="med"/>
+                      <a:tailEnd type="none" w="med" len="med"/>
                     </a:lnL>
-                    <a:lnR w="12700">
-                      <a:solidFill>
-                        <a:schemeClr val="tx1"/>
-                      </a:solidFill>
+                    <a:lnR w="12700" cap="flat" cmpd="sng" algn="ctr">
+                      <a:solidFill>
+                        <a:schemeClr val="tx1"/>
+                      </a:solidFill>
+                      <a:prstDash val="solid"/>
+                      <a:round/>
+                      <a:headEnd type="none" w="med" len="med"/>
+                      <a:tailEnd type="none" w="med" len="med"/>
                     </a:lnR>
                     <a:lnT w="12700">
                       <a:solidFill>
                         <a:schemeClr val="tx1"/>
                       </a:solidFill>
                     </a:lnT>
-                    <a:lnB w="12700">
-                      <a:solidFill>
-                        <a:schemeClr val="tx1"/>
-                      </a:solidFill>
+                    <a:lnB w="12700" cap="flat" cmpd="sng" algn="ctr">
+                      <a:solidFill>
+                        <a:schemeClr val="tx1"/>
+                      </a:solidFill>
+                      <a:prstDash val="solid"/>
+                      <a:round/>
+                      <a:headEnd type="none" w="med" len="med"/>
+                      <a:tailEnd type="none" w="med" len="med"/>
                     </a:lnB>
                     <a:noFill/>
                   </a:tcPr>
@@ -10171,9 +9660,181 @@
                         <a:buNone/>
                       </a:pPr>
                       <a:r>
-                        <a:rPr lang="en-US" sz="1100"/>
-                        <a:t>−9.0%</a:t>
-                      </a:r>
+                        <a:rPr lang="en-US" sz="1100" b="1">
+                          <a:latin typeface="Calibri" panose="020F0502020204030204" pitchFamily="34" charset="0"/>
+                        </a:rPr>
+                        <a:t>−2.0%</a:t>
+                      </a:r>
+                    </a:p>
+                  </a:txBody>
+                  <a:tcPr anchor="ctr">
+                    <a:lnL w="12700" cap="flat" cmpd="sng" algn="ctr">
+                      <a:solidFill>
+                        <a:schemeClr val="tx1"/>
+                      </a:solidFill>
+                      <a:prstDash val="solid"/>
+                      <a:round/>
+                      <a:headEnd type="none" w="med" len="med"/>
+                      <a:tailEnd type="none" w="med" len="med"/>
+                    </a:lnL>
+                    <a:lnR w="12700" cap="flat" cmpd="sng" algn="ctr">
+                      <a:solidFill>
+                        <a:schemeClr val="tx1"/>
+                      </a:solidFill>
+                      <a:prstDash val="solid"/>
+                      <a:round/>
+                      <a:headEnd type="none" w="med" len="med"/>
+                      <a:tailEnd type="none" w="med" len="med"/>
+                    </a:lnR>
+                    <a:lnT w="12700">
+                      <a:solidFill>
+                        <a:schemeClr val="tx1"/>
+                      </a:solidFill>
+                    </a:lnT>
+                    <a:lnB w="12700" cap="flat" cmpd="sng" algn="ctr">
+                      <a:solidFill>
+                        <a:schemeClr val="tx1"/>
+                      </a:solidFill>
+                      <a:prstDash val="solid"/>
+                      <a:round/>
+                      <a:headEnd type="none" w="med" len="med"/>
+                      <a:tailEnd type="none" w="med" len="med"/>
+                    </a:lnB>
+                    <a:noFill/>
+                  </a:tcPr>
+                </a:tc>
+                <a:tc>
+                  <a:txBody>
+                    <a:bodyPr/>
+                    <a:lstStyle/>
+                    <a:p>
+                      <a:pPr>
+                        <a:buNone/>
+                      </a:pPr>
+                      <a:r>
+                        <a:rPr lang="en-US" sz="1100" b="1">
+                          <a:latin typeface="Calibri" panose="020F0502020204030204" pitchFamily="34" charset="0"/>
+                        </a:rPr>
+                        <a:t>−1.0%</a:t>
+                      </a:r>
+                    </a:p>
+                  </a:txBody>
+                  <a:tcPr anchor="ctr">
+                    <a:lnL w="12700" cap="flat" cmpd="sng" algn="ctr">
+                      <a:solidFill>
+                        <a:schemeClr val="tx1"/>
+                      </a:solidFill>
+                      <a:prstDash val="solid"/>
+                      <a:round/>
+                      <a:headEnd type="none" w="med" len="med"/>
+                      <a:tailEnd type="none" w="med" len="med"/>
+                    </a:lnL>
+                    <a:lnR w="12700" cap="flat" cmpd="sng" algn="ctr">
+                      <a:solidFill>
+                        <a:schemeClr val="tx1"/>
+                      </a:solidFill>
+                      <a:prstDash val="solid"/>
+                      <a:round/>
+                      <a:headEnd type="none" w="med" len="med"/>
+                      <a:tailEnd type="none" w="med" len="med"/>
+                    </a:lnR>
+                    <a:lnT w="12700" cap="flat" cmpd="sng" algn="ctr">
+                      <a:solidFill>
+                        <a:schemeClr val="tx1"/>
+                      </a:solidFill>
+                      <a:prstDash val="solid"/>
+                      <a:round/>
+                      <a:headEnd type="none" w="med" len="med"/>
+                      <a:tailEnd type="none" w="med" len="med"/>
+                    </a:lnT>
+                    <a:lnB w="12700" cap="flat" cmpd="sng" algn="ctr">
+                      <a:solidFill>
+                        <a:schemeClr val="tx1"/>
+                      </a:solidFill>
+                      <a:prstDash val="solid"/>
+                      <a:round/>
+                      <a:headEnd type="none" w="med" len="med"/>
+                      <a:tailEnd type="none" w="med" len="med"/>
+                    </a:lnB>
+                    <a:noFill/>
+                  </a:tcPr>
+                </a:tc>
+                <a:tc>
+                  <a:txBody>
+                    <a:bodyPr/>
+                    <a:lstStyle/>
+                    <a:p>
+                      <a:pPr>
+                        <a:buNone/>
+                      </a:pPr>
+                      <a:r>
+                        <a:rPr lang="en-US" sz="1100" b="1">
+                          <a:latin typeface="Calibri" panose="020F0502020204030204" pitchFamily="34" charset="0"/>
+                        </a:rPr>
+                        <a:t>−4.8%</a:t>
+                      </a:r>
+                    </a:p>
+                  </a:txBody>
+                  <a:tcPr anchor="ctr">
+                    <a:lnL w="12700" cap="flat" cmpd="sng" algn="ctr">
+                      <a:solidFill>
+                        <a:schemeClr val="tx1"/>
+                      </a:solidFill>
+                      <a:prstDash val="solid"/>
+                      <a:round/>
+                      <a:headEnd type="none" w="med" len="med"/>
+                      <a:tailEnd type="none" w="med" len="med"/>
+                    </a:lnL>
+                    <a:lnR w="12700">
+                      <a:solidFill>
+                        <a:schemeClr val="tx1"/>
+                      </a:solidFill>
+                    </a:lnR>
+                    <a:lnT w="12700" cap="flat" cmpd="sng" algn="ctr">
+                      <a:solidFill>
+                        <a:schemeClr val="tx1"/>
+                      </a:solidFill>
+                      <a:prstDash val="solid"/>
+                      <a:round/>
+                      <a:headEnd type="none" w="med" len="med"/>
+                      <a:tailEnd type="none" w="med" len="med"/>
+                    </a:lnT>
+                    <a:lnB w="12700" cap="flat" cmpd="sng" algn="ctr">
+                      <a:solidFill>
+                        <a:schemeClr val="tx1"/>
+                      </a:solidFill>
+                      <a:prstDash val="solid"/>
+                      <a:round/>
+                      <a:headEnd type="none" w="med" len="med"/>
+                      <a:tailEnd type="none" w="med" len="med"/>
+                    </a:lnB>
+                    <a:noFill/>
+                  </a:tcPr>
+                </a:tc>
+                <a:extLst>
+                  <a:ext uri="{0D108BD9-81ED-4DB2-BD59-A6C34878D82A}">
+                    <a16:rowId xmlns:a16="http://schemas.microsoft.com/office/drawing/2014/main" val="2808930611"/>
+                  </a:ext>
+                </a:extLst>
+              </a:tr>
+              <a:tr h="221370">
+                <a:tc>
+                  <a:txBody>
+                    <a:bodyPr/>
+                    <a:lstStyle/>
+                    <a:p>
+                      <a:pPr>
+                        <a:buNone/>
+                      </a:pPr>
+                      <a:r>
+                        <a:rPr lang="en-US" sz="1100" b="0">
+                          <a:latin typeface="Calibri" panose="020F0502020204030204" pitchFamily="34" charset="0"/>
+                        </a:rPr>
+                        <a:t>Manhattan</a:t>
+                      </a:r>
+                      <a:endParaRPr lang="en-US" sz="1100" b="0" dirty="0">
+                        <a:latin typeface="Calibri" panose="020F0502020204030204" pitchFamily="34" charset="0"/>
+                      </a:endParaRPr>
                     </a:p>
                   </a:txBody>
                   <a:tcPr anchor="ctr">
@@ -10196,6 +9857,233 @@
                       <a:solidFill>
                         <a:schemeClr val="tx1"/>
                       </a:solidFill>
+                    </a:lnB>
+                    <a:noFill/>
+                  </a:tcPr>
+                </a:tc>
+                <a:tc>
+                  <a:txBody>
+                    <a:bodyPr/>
+                    <a:lstStyle/>
+                    <a:p>
+                      <a:pPr>
+                        <a:buNone/>
+                      </a:pPr>
+                      <a:r>
+                        <a:rPr lang="en-US" sz="1100" b="0">
+                          <a:latin typeface="Calibri" panose="020F0502020204030204" pitchFamily="34" charset="0"/>
+                        </a:rPr>
+                        <a:t>1,925,118</a:t>
+                      </a:r>
+                      <a:endParaRPr lang="en-US" sz="1100" b="0" dirty="0">
+                        <a:latin typeface="Calibri" panose="020F0502020204030204" pitchFamily="34" charset="0"/>
+                      </a:endParaRPr>
+                    </a:p>
+                  </a:txBody>
+                  <a:tcPr anchor="ctr">
+                    <a:lnL w="12700">
+                      <a:solidFill>
+                        <a:schemeClr val="tx1"/>
+                      </a:solidFill>
+                    </a:lnL>
+                    <a:lnR w="12700">
+                      <a:solidFill>
+                        <a:schemeClr val="tx1"/>
+                      </a:solidFill>
+                    </a:lnR>
+                    <a:lnT w="12700">
+                      <a:solidFill>
+                        <a:schemeClr val="tx1"/>
+                      </a:solidFill>
+                    </a:lnT>
+                    <a:lnB w="12700">
+                      <a:solidFill>
+                        <a:schemeClr val="tx1"/>
+                      </a:solidFill>
+                    </a:lnB>
+                    <a:noFill/>
+                  </a:tcPr>
+                </a:tc>
+                <a:tc>
+                  <a:txBody>
+                    <a:bodyPr/>
+                    <a:lstStyle/>
+                    <a:p>
+                      <a:pPr>
+                        <a:buNone/>
+                      </a:pPr>
+                      <a:r>
+                        <a:rPr lang="en-US" sz="1100" b="0">
+                          <a:latin typeface="Calibri" panose="020F0502020204030204" pitchFamily="34" charset="0"/>
+                        </a:rPr>
+                        <a:t>Times Sq-42 St (129,777)</a:t>
+                      </a:r>
+                    </a:p>
+                  </a:txBody>
+                  <a:tcPr anchor="ctr">
+                    <a:lnL w="12700">
+                      <a:solidFill>
+                        <a:schemeClr val="tx1"/>
+                      </a:solidFill>
+                    </a:lnL>
+                    <a:lnR w="12700">
+                      <a:solidFill>
+                        <a:schemeClr val="tx1"/>
+                      </a:solidFill>
+                    </a:lnR>
+                    <a:lnT w="12700">
+                      <a:solidFill>
+                        <a:schemeClr val="tx1"/>
+                      </a:solidFill>
+                    </a:lnT>
+                    <a:lnB w="12700">
+                      <a:solidFill>
+                        <a:schemeClr val="tx1"/>
+                      </a:solidFill>
+                    </a:lnB>
+                    <a:noFill/>
+                  </a:tcPr>
+                </a:tc>
+                <a:tc>
+                  <a:txBody>
+                    <a:bodyPr/>
+                    <a:lstStyle/>
+                    <a:p>
+                      <a:pPr>
+                        <a:buNone/>
+                      </a:pPr>
+                      <a:r>
+                        <a:rPr lang="en-US" sz="1100" b="0">
+                          <a:latin typeface="Calibri" panose="020F0502020204030204" pitchFamily="34" charset="0"/>
+                        </a:rPr>
+                        <a:t>−0.3%</a:t>
+                      </a:r>
+                    </a:p>
+                  </a:txBody>
+                  <a:tcPr anchor="ctr">
+                    <a:lnL w="12700">
+                      <a:solidFill>
+                        <a:schemeClr val="tx1"/>
+                      </a:solidFill>
+                    </a:lnL>
+                    <a:lnR w="12700" cap="flat" cmpd="sng" algn="ctr">
+                      <a:solidFill>
+                        <a:schemeClr val="tx1"/>
+                      </a:solidFill>
+                      <a:prstDash val="solid"/>
+                      <a:round/>
+                      <a:headEnd type="none" w="med" len="med"/>
+                      <a:tailEnd type="none" w="med" len="med"/>
+                    </a:lnR>
+                    <a:lnT w="12700">
+                      <a:solidFill>
+                        <a:schemeClr val="tx1"/>
+                      </a:solidFill>
+                    </a:lnT>
+                    <a:lnB w="12700">
+                      <a:solidFill>
+                        <a:schemeClr val="tx1"/>
+                      </a:solidFill>
+                    </a:lnB>
+                    <a:noFill/>
+                  </a:tcPr>
+                </a:tc>
+                <a:tc>
+                  <a:txBody>
+                    <a:bodyPr/>
+                    <a:lstStyle/>
+                    <a:p>
+                      <a:pPr>
+                        <a:buNone/>
+                      </a:pPr>
+                      <a:r>
+                        <a:rPr lang="en-US" sz="1100" b="0">
+                          <a:latin typeface="Calibri" panose="020F0502020204030204" pitchFamily="34" charset="0"/>
+                        </a:rPr>
+                        <a:t>+3.2%</a:t>
+                      </a:r>
+                    </a:p>
+                  </a:txBody>
+                  <a:tcPr anchor="ctr">
+                    <a:lnL w="12700">
+                      <a:solidFill>
+                        <a:schemeClr val="tx1"/>
+                      </a:solidFill>
+                    </a:lnL>
+                    <a:lnR w="12700" cap="flat" cmpd="sng" algn="ctr">
+                      <a:solidFill>
+                        <a:schemeClr val="tx1"/>
+                      </a:solidFill>
+                      <a:prstDash val="solid"/>
+                      <a:round/>
+                      <a:headEnd type="none" w="med" len="med"/>
+                      <a:tailEnd type="none" w="med" len="med"/>
+                    </a:lnR>
+                    <a:lnT w="12700" cap="flat" cmpd="sng" algn="ctr">
+                      <a:solidFill>
+                        <a:schemeClr val="tx1"/>
+                      </a:solidFill>
+                      <a:prstDash val="solid"/>
+                      <a:round/>
+                      <a:headEnd type="none" w="med" len="med"/>
+                      <a:tailEnd type="none" w="med" len="med"/>
+                    </a:lnT>
+                    <a:lnB w="12700" cap="flat" cmpd="sng" algn="ctr">
+                      <a:solidFill>
+                        <a:schemeClr val="tx1"/>
+                      </a:solidFill>
+                      <a:prstDash val="solid"/>
+                      <a:round/>
+                      <a:headEnd type="none" w="med" len="med"/>
+                      <a:tailEnd type="none" w="med" len="med"/>
+                    </a:lnB>
+                    <a:noFill/>
+                  </a:tcPr>
+                </a:tc>
+                <a:tc>
+                  <a:txBody>
+                    <a:bodyPr/>
+                    <a:lstStyle/>
+                    <a:p>
+                      <a:pPr>
+                        <a:buNone/>
+                      </a:pPr>
+                      <a:r>
+                        <a:rPr lang="en-US" sz="1100" b="0">
+                          <a:latin typeface="Calibri" panose="020F0502020204030204" pitchFamily="34" charset="0"/>
+                        </a:rPr>
+                        <a:t>−2.1%</a:t>
+                      </a:r>
+                    </a:p>
+                  </a:txBody>
+                  <a:tcPr anchor="ctr">
+                    <a:lnL w="12700">
+                      <a:solidFill>
+                        <a:schemeClr val="tx1"/>
+                      </a:solidFill>
+                    </a:lnL>
+                    <a:lnR w="12700">
+                      <a:solidFill>
+                        <a:schemeClr val="tx1"/>
+                      </a:solidFill>
+                    </a:lnR>
+                    <a:lnT w="12700" cap="flat" cmpd="sng" algn="ctr">
+                      <a:solidFill>
+                        <a:schemeClr val="tx1"/>
+                      </a:solidFill>
+                      <a:prstDash val="solid"/>
+                      <a:round/>
+                      <a:headEnd type="none" w="med" len="med"/>
+                      <a:tailEnd type="none" w="med" len="med"/>
+                    </a:lnT>
+                    <a:lnB w="12700" cap="flat" cmpd="sng" algn="ctr">
+                      <a:solidFill>
+                        <a:schemeClr val="tx1"/>
+                      </a:solidFill>
+                      <a:prstDash val="solid"/>
+                      <a:round/>
+                      <a:headEnd type="none" w="med" len="med"/>
+                      <a:tailEnd type="none" w="med" len="med"/>
                     </a:lnB>
                     <a:noFill/>
                   </a:tcPr>
@@ -10216,7 +10104,9 @@
                         <a:buNone/>
                       </a:pPr>
                       <a:r>
-                        <a:rPr lang="en-US" sz="1100"/>
+                        <a:rPr lang="en-US" sz="1100" b="0">
+                          <a:latin typeface="Calibri" panose="020F0502020204030204" pitchFamily="34" charset="0"/>
+                        </a:rPr>
                         <a:t>Brooklyn</a:t>
                       </a:r>
                     </a:p>
@@ -10254,9 +10144,14 @@
                         <a:buNone/>
                       </a:pPr>
                       <a:r>
-                        <a:rPr lang="en-US" sz="1100" dirty="0"/>
-                        <a:t>−4.1%</a:t>
-                      </a:r>
+                        <a:rPr lang="en-US" sz="1100" b="0">
+                          <a:latin typeface="Calibri" panose="020F0502020204030204" pitchFamily="34" charset="0"/>
+                        </a:rPr>
+                        <a:t>763,843</a:t>
+                      </a:r>
+                      <a:endParaRPr lang="en-US" sz="1100" b="0" dirty="0">
+                        <a:latin typeface="Calibri" panose="020F0502020204030204" pitchFamily="34" charset="0"/>
+                      </a:endParaRPr>
                     </a:p>
                   </a:txBody>
                   <a:tcPr anchor="ctr">
@@ -10292,8 +10187,10 @@
                         <a:buNone/>
                       </a:pPr>
                       <a:r>
-                        <a:rPr lang="en-US" sz="1100"/>
-                        <a:t>−5.7%</a:t>
+                        <a:rPr lang="en-US" sz="1100" b="0">
+                          <a:latin typeface="Calibri" panose="020F0502020204030204" pitchFamily="34" charset="0"/>
+                        </a:rPr>
+                        <a:t>Atlantic Av-Barclays Ctr (30,092)</a:t>
                       </a:r>
                     </a:p>
                   </a:txBody>
@@ -10330,8 +10227,10 @@
                         <a:buNone/>
                       </a:pPr>
                       <a:r>
-                        <a:rPr lang="en-US" sz="1100"/>
-                        <a:t>−8.7%</a:t>
+                        <a:rPr lang="en-US" sz="1100" b="0">
+                          <a:latin typeface="Calibri" panose="020F0502020204030204" pitchFamily="34" charset="0"/>
+                        </a:rPr>
+                        <a:t>−4.1%</a:t>
                       </a:r>
                     </a:p>
                   </a:txBody>
@@ -10341,10 +10240,14 @@
                         <a:schemeClr val="tx1"/>
                       </a:solidFill>
                     </a:lnL>
-                    <a:lnR w="12700">
-                      <a:solidFill>
-                        <a:schemeClr val="tx1"/>
-                      </a:solidFill>
+                    <a:lnR w="12700" cap="flat" cmpd="sng" algn="ctr">
+                      <a:solidFill>
+                        <a:schemeClr val="tx1"/>
+                      </a:solidFill>
+                      <a:prstDash val="solid"/>
+                      <a:round/>
+                      <a:headEnd type="none" w="med" len="med"/>
+                      <a:tailEnd type="none" w="med" len="med"/>
                     </a:lnR>
                     <a:lnT w="12700">
                       <a:solidFill>
@@ -10355,6 +10258,106 @@
                       <a:solidFill>
                         <a:schemeClr val="tx1"/>
                       </a:solidFill>
+                    </a:lnB>
+                    <a:noFill/>
+                  </a:tcPr>
+                </a:tc>
+                <a:tc>
+                  <a:txBody>
+                    <a:bodyPr/>
+                    <a:lstStyle/>
+                    <a:p>
+                      <a:pPr>
+                        <a:buNone/>
+                      </a:pPr>
+                      <a:r>
+                        <a:rPr lang="en-US" sz="1100" b="0">
+                          <a:latin typeface="Calibri" panose="020F0502020204030204" pitchFamily="34" charset="0"/>
+                        </a:rPr>
+                        <a:t>−5.7%</a:t>
+                      </a:r>
+                    </a:p>
+                  </a:txBody>
+                  <a:tcPr anchor="ctr">
+                    <a:lnL w="12700">
+                      <a:solidFill>
+                        <a:schemeClr val="tx1"/>
+                      </a:solidFill>
+                    </a:lnL>
+                    <a:lnR w="12700" cap="flat" cmpd="sng" algn="ctr">
+                      <a:solidFill>
+                        <a:schemeClr val="tx1"/>
+                      </a:solidFill>
+                      <a:prstDash val="solid"/>
+                      <a:round/>
+                      <a:headEnd type="none" w="med" len="med"/>
+                      <a:tailEnd type="none" w="med" len="med"/>
+                    </a:lnR>
+                    <a:lnT w="12700" cap="flat" cmpd="sng" algn="ctr">
+                      <a:solidFill>
+                        <a:schemeClr val="tx1"/>
+                      </a:solidFill>
+                      <a:prstDash val="solid"/>
+                      <a:round/>
+                      <a:headEnd type="none" w="med" len="med"/>
+                      <a:tailEnd type="none" w="med" len="med"/>
+                    </a:lnT>
+                    <a:lnB w="12700" cap="flat" cmpd="sng" algn="ctr">
+                      <a:solidFill>
+                        <a:schemeClr val="tx1"/>
+                      </a:solidFill>
+                      <a:prstDash val="solid"/>
+                      <a:round/>
+                      <a:headEnd type="none" w="med" len="med"/>
+                      <a:tailEnd type="none" w="med" len="med"/>
+                    </a:lnB>
+                    <a:noFill/>
+                  </a:tcPr>
+                </a:tc>
+                <a:tc>
+                  <a:txBody>
+                    <a:bodyPr/>
+                    <a:lstStyle/>
+                    <a:p>
+                      <a:pPr>
+                        <a:buNone/>
+                      </a:pPr>
+                      <a:r>
+                        <a:rPr lang="en-US" sz="1100" b="0">
+                          <a:latin typeface="Calibri" panose="020F0502020204030204" pitchFamily="34" charset="0"/>
+                        </a:rPr>
+                        <a:t>−8.7%</a:t>
+                      </a:r>
+                    </a:p>
+                  </a:txBody>
+                  <a:tcPr anchor="ctr">
+                    <a:lnL w="12700">
+                      <a:solidFill>
+                        <a:schemeClr val="tx1"/>
+                      </a:solidFill>
+                    </a:lnL>
+                    <a:lnR w="12700">
+                      <a:solidFill>
+                        <a:schemeClr val="tx1"/>
+                      </a:solidFill>
+                    </a:lnR>
+                    <a:lnT w="12700" cap="flat" cmpd="sng" algn="ctr">
+                      <a:solidFill>
+                        <a:schemeClr val="tx1"/>
+                      </a:solidFill>
+                      <a:prstDash val="solid"/>
+                      <a:round/>
+                      <a:headEnd type="none" w="med" len="med"/>
+                      <a:tailEnd type="none" w="med" len="med"/>
+                    </a:lnT>
+                    <a:lnB w="12700" cap="flat" cmpd="sng" algn="ctr">
+                      <a:solidFill>
+                        <a:schemeClr val="tx1"/>
+                      </a:solidFill>
+                      <a:prstDash val="solid"/>
+                      <a:round/>
+                      <a:headEnd type="none" w="med" len="med"/>
+                      <a:tailEnd type="none" w="med" len="med"/>
                     </a:lnB>
                     <a:noFill/>
                   </a:tcPr>
@@ -10375,9 +10378,14 @@
                         <a:buNone/>
                       </a:pPr>
                       <a:r>
-                        <a:rPr lang="en-US" sz="1100" dirty="0"/>
-                        <a:t>Manhattan</a:t>
-                      </a:r>
+                        <a:rPr lang="en-US" sz="1100" b="0">
+                          <a:latin typeface="Calibri" panose="020F0502020204030204" pitchFamily="34" charset="0"/>
+                        </a:rPr>
+                        <a:t>Queens</a:t>
+                      </a:r>
+                      <a:endParaRPr lang="en-US" sz="1100" b="0" dirty="0">
+                        <a:latin typeface="Calibri" panose="020F0502020204030204" pitchFamily="34" charset="0"/>
+                      </a:endParaRPr>
                     </a:p>
                   </a:txBody>
                   <a:tcPr anchor="ctr">
@@ -10413,9 +10421,14 @@
                         <a:buNone/>
                       </a:pPr>
                       <a:r>
-                        <a:rPr lang="en-US" sz="1100" dirty="0"/>
-                        <a:t>−0.3%</a:t>
-                      </a:r>
+                        <a:rPr lang="en-US" sz="1100" b="0">
+                          <a:latin typeface="Calibri" panose="020F0502020204030204" pitchFamily="34" charset="0"/>
+                        </a:rPr>
+                        <a:t>511,976</a:t>
+                      </a:r>
+                      <a:endParaRPr lang="en-US" sz="1100" b="0" dirty="0">
+                        <a:latin typeface="Calibri" panose="020F0502020204030204" pitchFamily="34" charset="0"/>
+                      </a:endParaRPr>
                     </a:p>
                   </a:txBody>
                   <a:tcPr anchor="ctr">
@@ -10451,8 +10464,10 @@
                         <a:buNone/>
                       </a:pPr>
                       <a:r>
-                        <a:rPr lang="en-US" sz="1100"/>
-                        <a:t>+3.2%</a:t>
+                        <a:rPr lang="en-US" sz="1100" b="0">
+                          <a:latin typeface="Calibri" panose="020F0502020204030204" pitchFamily="34" charset="0"/>
+                        </a:rPr>
+                        <a:t>Flushing-Main St (41,124)</a:t>
                       </a:r>
                     </a:p>
                   </a:txBody>
@@ -10489,8 +10504,10 @@
                         <a:buNone/>
                       </a:pPr>
                       <a:r>
-                        <a:rPr lang="en-US" sz="1100"/>
-                        <a:t>−2.1%</a:t>
+                        <a:rPr lang="en-US" sz="1100" b="0">
+                          <a:latin typeface="Calibri" panose="020F0502020204030204" pitchFamily="34" charset="0"/>
+                        </a:rPr>
+                        <a:t>−4.2%</a:t>
                       </a:r>
                     </a:p>
                   </a:txBody>
@@ -10500,10 +10517,14 @@
                         <a:schemeClr val="tx1"/>
                       </a:solidFill>
                     </a:lnL>
-                    <a:lnR w="12700">
-                      <a:solidFill>
-                        <a:schemeClr val="tx1"/>
-                      </a:solidFill>
+                    <a:lnR w="12700" cap="flat" cmpd="sng" algn="ctr">
+                      <a:solidFill>
+                        <a:schemeClr val="tx1"/>
+                      </a:solidFill>
+                      <a:prstDash val="solid"/>
+                      <a:round/>
+                      <a:headEnd type="none" w="med" len="med"/>
+                      <a:tailEnd type="none" w="med" len="med"/>
                     </a:lnR>
                     <a:lnT w="12700">
                       <a:solidFill>
@@ -10514,6 +10535,106 @@
                       <a:solidFill>
                         <a:schemeClr val="tx1"/>
                       </a:solidFill>
+                    </a:lnB>
+                    <a:noFill/>
+                  </a:tcPr>
+                </a:tc>
+                <a:tc>
+                  <a:txBody>
+                    <a:bodyPr/>
+                    <a:lstStyle/>
+                    <a:p>
+                      <a:pPr>
+                        <a:buNone/>
+                      </a:pPr>
+                      <a:r>
+                        <a:rPr lang="en-US" sz="1100" b="0">
+                          <a:latin typeface="Calibri" panose="020F0502020204030204" pitchFamily="34" charset="0"/>
+                        </a:rPr>
+                        <a:t>−7.1%</a:t>
+                      </a:r>
+                    </a:p>
+                  </a:txBody>
+                  <a:tcPr anchor="ctr">
+                    <a:lnL w="12700">
+                      <a:solidFill>
+                        <a:schemeClr val="tx1"/>
+                      </a:solidFill>
+                    </a:lnL>
+                    <a:lnR w="12700" cap="flat" cmpd="sng" algn="ctr">
+                      <a:solidFill>
+                        <a:schemeClr val="tx1"/>
+                      </a:solidFill>
+                      <a:prstDash val="solid"/>
+                      <a:round/>
+                      <a:headEnd type="none" w="med" len="med"/>
+                      <a:tailEnd type="none" w="med" len="med"/>
+                    </a:lnR>
+                    <a:lnT w="12700" cap="flat" cmpd="sng" algn="ctr">
+                      <a:solidFill>
+                        <a:schemeClr val="tx1"/>
+                      </a:solidFill>
+                      <a:prstDash val="solid"/>
+                      <a:round/>
+                      <a:headEnd type="none" w="med" len="med"/>
+                      <a:tailEnd type="none" w="med" len="med"/>
+                    </a:lnT>
+                    <a:lnB w="12700" cap="flat" cmpd="sng" algn="ctr">
+                      <a:solidFill>
+                        <a:schemeClr val="tx1"/>
+                      </a:solidFill>
+                      <a:prstDash val="solid"/>
+                      <a:round/>
+                      <a:headEnd type="none" w="med" len="med"/>
+                      <a:tailEnd type="none" w="med" len="med"/>
+                    </a:lnB>
+                    <a:noFill/>
+                  </a:tcPr>
+                </a:tc>
+                <a:tc>
+                  <a:txBody>
+                    <a:bodyPr/>
+                    <a:lstStyle/>
+                    <a:p>
+                      <a:pPr>
+                        <a:buNone/>
+                      </a:pPr>
+                      <a:r>
+                        <a:rPr lang="en-US" sz="1100" b="0">
+                          <a:latin typeface="Calibri" panose="020F0502020204030204" pitchFamily="34" charset="0"/>
+                        </a:rPr>
+                        <a:t>−8.6%</a:t>
+                      </a:r>
+                    </a:p>
+                  </a:txBody>
+                  <a:tcPr anchor="ctr">
+                    <a:lnL w="12700">
+                      <a:solidFill>
+                        <a:schemeClr val="tx1"/>
+                      </a:solidFill>
+                    </a:lnL>
+                    <a:lnR w="12700">
+                      <a:solidFill>
+                        <a:schemeClr val="tx1"/>
+                      </a:solidFill>
+                    </a:lnR>
+                    <a:lnT w="12700" cap="flat" cmpd="sng" algn="ctr">
+                      <a:solidFill>
+                        <a:schemeClr val="tx1"/>
+                      </a:solidFill>
+                      <a:prstDash val="solid"/>
+                      <a:round/>
+                      <a:headEnd type="none" w="med" len="med"/>
+                      <a:tailEnd type="none" w="med" len="med"/>
+                    </a:lnT>
+                    <a:lnB w="12700" cap="flat" cmpd="sng" algn="ctr">
+                      <a:solidFill>
+                        <a:schemeClr val="tx1"/>
+                      </a:solidFill>
+                      <a:prstDash val="solid"/>
+                      <a:round/>
+                      <a:headEnd type="none" w="med" len="med"/>
+                      <a:tailEnd type="none" w="med" len="med"/>
                     </a:lnB>
                     <a:noFill/>
                   </a:tcPr>
@@ -10534,9 +10655,14 @@
                         <a:buNone/>
                       </a:pPr>
                       <a:r>
-                        <a:rPr lang="en-US" sz="1100" dirty="0"/>
-                        <a:t>Queens</a:t>
-                      </a:r>
+                        <a:rPr lang="en-US" sz="1100" b="0">
+                          <a:latin typeface="Calibri" panose="020F0502020204030204" pitchFamily="34" charset="0"/>
+                        </a:rPr>
+                        <a:t>Bronx</a:t>
+                      </a:r>
+                      <a:endParaRPr lang="en-US" sz="1100" b="0" dirty="0">
+                        <a:latin typeface="Calibri" panose="020F0502020204030204" pitchFamily="34" charset="0"/>
+                      </a:endParaRPr>
                     </a:p>
                   </a:txBody>
                   <a:tcPr anchor="ctr">
@@ -10572,8 +10698,10 @@
                         <a:buNone/>
                       </a:pPr>
                       <a:r>
-                        <a:rPr lang="en-US" sz="1100"/>
-                        <a:t>−4.2%</a:t>
+                        <a:rPr lang="en-US" sz="1100" b="0">
+                          <a:latin typeface="Calibri" panose="020F0502020204030204" pitchFamily="34" charset="0"/>
+                        </a:rPr>
+                        <a:t>236,300</a:t>
                       </a:r>
                     </a:p>
                   </a:txBody>
@@ -10610,9 +10738,14 @@
                         <a:buNone/>
                       </a:pPr>
                       <a:r>
-                        <a:rPr lang="en-US" sz="1100" dirty="0"/>
-                        <a:t>−7.1%</a:t>
-                      </a:r>
+                        <a:rPr lang="en-US" sz="1100" b="0">
+                          <a:latin typeface="Calibri" panose="020F0502020204030204" pitchFamily="34" charset="0"/>
+                        </a:rPr>
+                        <a:t>161 St-Yankee Stadium (18,164)</a:t>
+                      </a:r>
+                      <a:endParaRPr lang="en-US" sz="1100" b="0" dirty="0">
+                        <a:latin typeface="Calibri" panose="020F0502020204030204" pitchFamily="34" charset="0"/>
+                      </a:endParaRPr>
                     </a:p>
                   </a:txBody>
                   <a:tcPr anchor="ctr">
@@ -10648,9 +10781,14 @@
                         <a:buNone/>
                       </a:pPr>
                       <a:r>
-                        <a:rPr lang="en-US" sz="1100" dirty="0"/>
-                        <a:t>−8.6%</a:t>
-                      </a:r>
+                        <a:rPr lang="en-US" sz="1100" b="0">
+                          <a:latin typeface="Calibri" panose="020F0502020204030204" pitchFamily="34" charset="0"/>
+                        </a:rPr>
+                        <a:t>−3.7%</a:t>
+                      </a:r>
+                      <a:endParaRPr lang="en-US" sz="1100" b="0" dirty="0">
+                        <a:latin typeface="Calibri" panose="020F0502020204030204" pitchFamily="34" charset="0"/>
+                      </a:endParaRPr>
                     </a:p>
                   </a:txBody>
                   <a:tcPr anchor="ctr">
@@ -10659,15 +10797,117 @@
                         <a:schemeClr val="tx1"/>
                       </a:solidFill>
                     </a:lnL>
-                    <a:lnR w="12700">
-                      <a:solidFill>
-                        <a:schemeClr val="tx1"/>
-                      </a:solidFill>
+                    <a:lnR w="12700" cap="flat" cmpd="sng" algn="ctr">
+                      <a:solidFill>
+                        <a:schemeClr val="tx1"/>
+                      </a:solidFill>
+                      <a:prstDash val="solid"/>
+                      <a:round/>
+                      <a:headEnd type="none" w="med" len="med"/>
+                      <a:tailEnd type="none" w="med" len="med"/>
                     </a:lnR>
                     <a:lnT w="12700">
                       <a:solidFill>
                         <a:schemeClr val="tx1"/>
                       </a:solidFill>
+                    </a:lnT>
+                    <a:lnB w="12700">
+                      <a:solidFill>
+                        <a:schemeClr val="tx1"/>
+                      </a:solidFill>
+                    </a:lnB>
+                    <a:noFill/>
+                  </a:tcPr>
+                </a:tc>
+                <a:tc>
+                  <a:txBody>
+                    <a:bodyPr/>
+                    <a:lstStyle/>
+                    <a:p>
+                      <a:pPr>
+                        <a:buNone/>
+                      </a:pPr>
+                      <a:r>
+                        <a:rPr lang="en-US" sz="1100" b="0">
+                          <a:latin typeface="Calibri" panose="020F0502020204030204" pitchFamily="34" charset="0"/>
+                        </a:rPr>
+                        <a:t>−10.3%</a:t>
+                      </a:r>
+                      <a:endParaRPr lang="en-US" sz="1100" b="0" dirty="0">
+                        <a:latin typeface="Calibri" panose="020F0502020204030204" pitchFamily="34" charset="0"/>
+                      </a:endParaRPr>
+                    </a:p>
+                  </a:txBody>
+                  <a:tcPr anchor="ctr">
+                    <a:lnL w="12700">
+                      <a:solidFill>
+                        <a:schemeClr val="tx1"/>
+                      </a:solidFill>
+                    </a:lnL>
+                    <a:lnR w="12700" cap="flat" cmpd="sng" algn="ctr">
+                      <a:solidFill>
+                        <a:schemeClr val="tx1"/>
+                      </a:solidFill>
+                      <a:prstDash val="solid"/>
+                      <a:round/>
+                      <a:headEnd type="none" w="med" len="med"/>
+                      <a:tailEnd type="none" w="med" len="med"/>
+                    </a:lnR>
+                    <a:lnT w="12700" cap="flat" cmpd="sng" algn="ctr">
+                      <a:solidFill>
+                        <a:schemeClr val="tx1"/>
+                      </a:solidFill>
+                      <a:prstDash val="solid"/>
+                      <a:round/>
+                      <a:headEnd type="none" w="med" len="med"/>
+                      <a:tailEnd type="none" w="med" len="med"/>
+                    </a:lnT>
+                    <a:lnB w="12700">
+                      <a:solidFill>
+                        <a:schemeClr val="tx1"/>
+                      </a:solidFill>
+                    </a:lnB>
+                    <a:noFill/>
+                  </a:tcPr>
+                </a:tc>
+                <a:tc>
+                  <a:txBody>
+                    <a:bodyPr/>
+                    <a:lstStyle/>
+                    <a:p>
+                      <a:pPr>
+                        <a:buNone/>
+                      </a:pPr>
+                      <a:r>
+                        <a:rPr lang="en-US" sz="1100" b="0">
+                          <a:latin typeface="Calibri" panose="020F0502020204030204" pitchFamily="34" charset="0"/>
+                        </a:rPr>
+                        <a:t>−9.0%</a:t>
+                      </a:r>
+                      <a:endParaRPr lang="en-US" sz="1100" b="0" dirty="0">
+                        <a:latin typeface="Calibri" panose="020F0502020204030204" pitchFamily="34" charset="0"/>
+                      </a:endParaRPr>
+                    </a:p>
+                  </a:txBody>
+                  <a:tcPr anchor="ctr">
+                    <a:lnL w="12700">
+                      <a:solidFill>
+                        <a:schemeClr val="tx1"/>
+                      </a:solidFill>
+                    </a:lnL>
+                    <a:lnR w="12700">
+                      <a:solidFill>
+                        <a:schemeClr val="tx1"/>
+                      </a:solidFill>
+                    </a:lnR>
+                    <a:lnT w="12700" cap="flat" cmpd="sng" algn="ctr">
+                      <a:solidFill>
+                        <a:schemeClr val="tx1"/>
+                      </a:solidFill>
+                      <a:prstDash val="solid"/>
+                      <a:round/>
+                      <a:headEnd type="none" w="med" len="med"/>
+                      <a:tailEnd type="none" w="med" len="med"/>
                     </a:lnT>
                     <a:lnB w="12700">
                       <a:solidFill>
@@ -10776,7 +11016,7 @@
         </p:nvSpPr>
         <p:spPr>
           <a:xfrm>
-            <a:off x="21716" y="8289064"/>
+            <a:off x="21716" y="8869680"/>
             <a:ext cx="6799705" cy="261610"/>
           </a:xfrm>
           <a:prstGeom prst="rect">
@@ -10818,7 +11058,7 @@
         </p:nvSpPr>
         <p:spPr>
           <a:xfrm>
-            <a:off x="21712" y="10068621"/>
+            <a:off x="21712" y="9143991"/>
             <a:ext cx="7541137" cy="600164"/>
           </a:xfrm>
           <a:prstGeom prst="rect">

--- a/report/NYC_Subway_Part1_Delivrable_Report.pptx
+++ b/report/NYC_Subway_Part1_Delivrable_Report.pptx
@@ -8437,7 +8437,7 @@
         </p:nvSpPr>
         <p:spPr>
           <a:xfrm>
-            <a:off x="85216" y="4073043"/>
+            <a:off x="85216" y="4854922"/>
             <a:ext cx="7425657" cy="307777"/>
           </a:xfrm>
           <a:prstGeom prst="rect">
@@ -8456,7 +8456,7 @@
                 <a:ea typeface="Calibri"/>
                 <a:cs typeface="Calibri"/>
               </a:rPr>
-              <a:t>1. Aggregate ridership by station complex and hour</a:t>
+              <a:t>2. Aggregate ridership by station complex and hour</a:t>
             </a:r>
             <a:endParaRPr lang="en-US" dirty="0"/>
           </a:p>
@@ -8476,7 +8476,7 @@
         </p:nvSpPr>
         <p:spPr>
           <a:xfrm>
-            <a:off x="-13020" y="4368566"/>
+            <a:off x="-13020" y="5137193"/>
             <a:ext cx="7541133" cy="430887"/>
           </a:xfrm>
           <a:prstGeom prst="rect">
@@ -8532,7 +8532,7 @@
         </p:nvSpPr>
         <p:spPr>
           <a:xfrm>
-            <a:off x="85375" y="4778590"/>
+            <a:off x="85375" y="5547217"/>
             <a:ext cx="7391359" cy="307777"/>
           </a:xfrm>
           <a:prstGeom prst="rect">
@@ -8548,7 +8548,7 @@
           <a:p>
             <a:r>
               <a:rPr lang="en-US" sz="1400" b="1" dirty="0"/>
-              <a:t>2. The use of dry weather as the baseline</a:t>
+              <a:t>3. The use of dry weather as the baseline</a:t>
             </a:r>
             <a:endParaRPr lang="en-US" sz="1400" b="1" dirty="0">
               <a:ea typeface="Calibri"/>
@@ -8571,7 +8571,7 @@
         </p:nvSpPr>
         <p:spPr>
           <a:xfrm>
-            <a:off x="-9053" y="5028194"/>
+            <a:off x="-9053" y="5796821"/>
             <a:ext cx="7562849" cy="430887"/>
           </a:xfrm>
           <a:prstGeom prst="rect">
@@ -8627,7 +8627,7 @@
         </p:nvSpPr>
         <p:spPr>
           <a:xfrm>
-            <a:off x="158508" y="5452004"/>
+            <a:off x="158508" y="6220631"/>
             <a:ext cx="7318226" cy="319703"/>
           </a:xfrm>
           <a:prstGeom prst="rect">
@@ -8737,7 +8737,7 @@
                 <a:ea typeface="+mn-lt"/>
                 <a:cs typeface="+mn-lt"/>
               </a:rPr>
-              <a:t>3. Excluding records with missing weather conditions</a:t>
+              <a:t>4. Excluding records with missing weather conditions</a:t>
             </a:r>
             <a:endParaRPr lang="en-US" sz="1400" b="1" dirty="0">
               <a:ea typeface="Calibri"/>
@@ -8760,7 +8760,7 @@
         </p:nvSpPr>
         <p:spPr>
           <a:xfrm>
-            <a:off x="106241" y="6136249"/>
+            <a:off x="106241" y="6904876"/>
             <a:ext cx="6647688" cy="361583"/>
           </a:xfrm>
           <a:prstGeom prst="rect">
@@ -8898,7 +8898,7 @@
         </p:nvSpPr>
         <p:spPr>
           <a:xfrm>
-            <a:off x="21716" y="6446775"/>
+            <a:off x="21716" y="7215402"/>
             <a:ext cx="7541133" cy="413852"/>
           </a:xfrm>
           <a:prstGeom prst="rect">
@@ -9037,7 +9037,7 @@
         </p:nvSpPr>
         <p:spPr>
           <a:xfrm>
-            <a:off x="184968" y="6853217"/>
+            <a:off x="184968" y="7621844"/>
             <a:ext cx="7315200" cy="229396"/>
           </a:xfrm>
           <a:prstGeom prst="rect">
@@ -9167,13 +9167,13 @@
           <p:nvPr>
             <p:extLst>
               <p:ext uri="{D42A27DB-BD31-4B8C-83A1-F6EECF244321}">
-                <p14:modId xmlns:p14="http://schemas.microsoft.com/office/powerpoint/2010/main" val="2849285276"/>
+                <p14:modId xmlns:p14="http://schemas.microsoft.com/office/powerpoint/2010/main" val="2300984123"/>
               </p:ext>
             </p:extLst>
           </p:nvPr>
         </p:nvGraphicFramePr>
         <p:xfrm>
-          <a:off x="17147" y="7109460"/>
+          <a:off x="17147" y="7878087"/>
           <a:ext cx="7510780" cy="1722120"/>
         </p:xfrm>
         <a:graphic>
@@ -10941,7 +10941,7 @@
         </p:nvSpPr>
         <p:spPr>
           <a:xfrm>
-            <a:off x="-589" y="5739640"/>
+            <a:off x="-589" y="6508267"/>
             <a:ext cx="7562849" cy="430887"/>
           </a:xfrm>
           <a:prstGeom prst="rect">
@@ -11016,7 +11016,7 @@
         </p:nvSpPr>
         <p:spPr>
           <a:xfrm>
-            <a:off x="21716" y="8869680"/>
+            <a:off x="21716" y="9638307"/>
             <a:ext cx="6799705" cy="261610"/>
           </a:xfrm>
           <a:prstGeom prst="rect">
@@ -11058,7 +11058,7 @@
         </p:nvSpPr>
         <p:spPr>
           <a:xfrm>
-            <a:off x="21712" y="9143991"/>
+            <a:off x="21712" y="9912618"/>
             <a:ext cx="7541137" cy="600164"/>
           </a:xfrm>
           <a:prstGeom prst="rect">
@@ -11082,6 +11082,260 @@
             <a:endParaRPr lang="en-US" sz="1100" dirty="0">
               <a:ea typeface="Calibri"/>
               <a:cs typeface="Calibri"/>
+            </a:endParaRPr>
+          </a:p>
+        </p:txBody>
+      </p:sp>
+      <p:sp>
+        <p:nvSpPr>
+          <p:cNvPr id="8" name="ZoneTexte 9">
+            <a:extLst>
+              <a:ext uri="{FF2B5EF4-FFF2-40B4-BE49-F238E27FC236}">
+                <a16:creationId xmlns:a16="http://schemas.microsoft.com/office/drawing/2014/main" id="{F34E2F11-9CD4-E48E-F801-D00294F6289C}"/>
+              </a:ext>
+            </a:extLst>
+          </p:cNvPr>
+          <p:cNvSpPr txBox="1"/>
+          <p:nvPr/>
+        </p:nvSpPr>
+        <p:spPr>
+          <a:xfrm>
+            <a:off x="91844" y="4079669"/>
+            <a:ext cx="7425657" cy="307777"/>
+          </a:xfrm>
+          <a:prstGeom prst="rect">
+            <a:avLst/>
+          </a:prstGeom>
+          <a:noFill/>
+        </p:spPr>
+        <p:txBody>
+          <a:bodyPr wrap="square" lIns="91440" tIns="45720" rIns="91440" bIns="45720" rtlCol="0" anchor="t">
+            <a:spAutoFit/>
+          </a:bodyPr>
+          <a:lstStyle/>
+          <a:p>
+            <a:r>
+              <a:rPr lang="en-US" sz="1400" b="1" dirty="0">
+                <a:ea typeface="Calibri"/>
+                <a:cs typeface="Calibri"/>
+              </a:rPr>
+              <a:t>1. The Bronze, Silver and Gold architecture</a:t>
+            </a:r>
+            <a:endParaRPr lang="en-US" dirty="0"/>
+          </a:p>
+        </p:txBody>
+      </p:sp>
+      <p:sp>
+        <p:nvSpPr>
+          <p:cNvPr id="11" name="ZoneTexte 9">
+            <a:extLst>
+              <a:ext uri="{FF2B5EF4-FFF2-40B4-BE49-F238E27FC236}">
+                <a16:creationId xmlns:a16="http://schemas.microsoft.com/office/drawing/2014/main" id="{ECFB3B04-48E3-5A28-0997-6128541245DC}"/>
+              </a:ext>
+            </a:extLst>
+          </p:cNvPr>
+          <p:cNvSpPr txBox="1"/>
+          <p:nvPr/>
+        </p:nvSpPr>
+        <p:spPr>
+          <a:xfrm>
+            <a:off x="-6392" y="4335435"/>
+            <a:ext cx="7541133" cy="600164"/>
+          </a:xfrm>
+          <a:prstGeom prst="rect">
+            <a:avLst/>
+          </a:prstGeom>
+          <a:noFill/>
+        </p:spPr>
+        <p:txBody>
+          <a:bodyPr wrap="square" lIns="91440" tIns="45720" rIns="91440" bIns="45720" rtlCol="0" anchor="t">
+            <a:spAutoFit/>
+          </a:bodyPr>
+          <a:lstStyle/>
+          <a:p>
+            <a:pPr marL="171450" indent="-171450">
+              <a:buFont typeface="Arial" panose="020B0604020202020204" pitchFamily="34" charset="0"/>
+              <a:buChar char="•"/>
+            </a:pPr>
+            <a:r>
+              <a:rPr lang="fr-FR" sz="1100" dirty="0" err="1"/>
+              <a:t>We</a:t>
+            </a:r>
+            <a:r>
+              <a:rPr lang="fr-FR" sz="1100" dirty="0"/>
+              <a:t> </a:t>
+            </a:r>
+            <a:r>
+              <a:rPr lang="fr-FR" sz="1100" dirty="0" err="1"/>
+              <a:t>adopted</a:t>
+            </a:r>
+            <a:r>
+              <a:rPr lang="fr-FR" sz="1100" dirty="0"/>
+              <a:t> a Bronze, Silver and Gold architecture to </a:t>
+            </a:r>
+            <a:r>
+              <a:rPr lang="fr-FR" sz="1100" dirty="0" err="1"/>
+              <a:t>separate</a:t>
+            </a:r>
+            <a:r>
+              <a:rPr lang="fr-FR" sz="1100" dirty="0"/>
+              <a:t> ingestion, </a:t>
+            </a:r>
+            <a:r>
+              <a:rPr lang="fr-FR" sz="1100" dirty="0" err="1"/>
+              <a:t>cleaning</a:t>
+            </a:r>
+            <a:r>
+              <a:rPr lang="fr-FR" sz="1100" dirty="0"/>
+              <a:t>, and </a:t>
+            </a:r>
+            <a:r>
+              <a:rPr lang="fr-FR" sz="1100" dirty="0" err="1"/>
+              <a:t>analysis</a:t>
+            </a:r>
+            <a:r>
+              <a:rPr lang="fr-FR" sz="1100" dirty="0"/>
+              <a:t>, </a:t>
+            </a:r>
+            <a:r>
+              <a:rPr lang="fr-FR" sz="1100" dirty="0" err="1"/>
+              <a:t>while</a:t>
+            </a:r>
+            <a:r>
+              <a:rPr lang="fr-FR" sz="1100" dirty="0"/>
+              <a:t> </a:t>
+            </a:r>
+            <a:r>
+              <a:rPr lang="fr-FR" sz="1100" dirty="0" err="1"/>
+              <a:t>preserving</a:t>
+            </a:r>
+            <a:r>
+              <a:rPr lang="fr-FR" sz="1100" dirty="0"/>
+              <a:t> the original CSV files and </a:t>
+            </a:r>
+            <a:r>
+              <a:rPr lang="fr-FR" sz="1100" dirty="0" err="1"/>
+              <a:t>making</a:t>
+            </a:r>
+            <a:r>
+              <a:rPr lang="fr-FR" sz="1100" dirty="0"/>
+              <a:t> </a:t>
+            </a:r>
+            <a:r>
+              <a:rPr lang="fr-FR" sz="1100" dirty="0" err="1"/>
+              <a:t>each</a:t>
+            </a:r>
+            <a:r>
+              <a:rPr lang="fr-FR" sz="1100" dirty="0"/>
+              <a:t> stage </a:t>
+            </a:r>
+            <a:r>
+              <a:rPr lang="fr-FR" sz="1100" dirty="0" err="1"/>
+              <a:t>reproducible</a:t>
+            </a:r>
+            <a:r>
+              <a:rPr lang="fr-FR" sz="1100" dirty="0"/>
+              <a:t>. </a:t>
+            </a:r>
+            <a:r>
+              <a:rPr lang="fr-FR" sz="1100" dirty="0" err="1"/>
+              <a:t>We</a:t>
+            </a:r>
+            <a:r>
+              <a:rPr lang="fr-FR" sz="1100" dirty="0"/>
+              <a:t> chose the station </a:t>
+            </a:r>
+            <a:r>
+              <a:rPr lang="fr-FR" sz="1100" dirty="0" err="1"/>
+              <a:t>complex</a:t>
+            </a:r>
+            <a:r>
+              <a:rPr lang="fr-FR" sz="1100" dirty="0"/>
+              <a:t> </a:t>
+            </a:r>
+            <a:r>
+              <a:rPr lang="fr-FR" sz="1100" dirty="0" err="1"/>
+              <a:t>rather</a:t>
+            </a:r>
+            <a:r>
+              <a:rPr lang="fr-FR" sz="1100" dirty="0"/>
+              <a:t> </a:t>
+            </a:r>
+            <a:r>
+              <a:rPr lang="fr-FR" sz="1100" dirty="0" err="1"/>
+              <a:t>than</a:t>
+            </a:r>
+            <a:r>
+              <a:rPr lang="fr-FR" sz="1100" dirty="0"/>
+              <a:t> </a:t>
+            </a:r>
+            <a:r>
+              <a:rPr lang="fr-FR" sz="1100" dirty="0" err="1"/>
+              <a:t>individual</a:t>
+            </a:r>
+            <a:r>
+              <a:rPr lang="fr-FR" sz="1100" dirty="0"/>
+              <a:t> platforms as the unit of </a:t>
+            </a:r>
+            <a:r>
+              <a:rPr lang="fr-FR" sz="1100" dirty="0" err="1"/>
+              <a:t>analysis</a:t>
+            </a:r>
+            <a:r>
+              <a:rPr lang="fr-FR" sz="1100" dirty="0"/>
+              <a:t> </a:t>
+            </a:r>
+            <a:r>
+              <a:rPr lang="fr-FR" sz="1100" dirty="0" err="1"/>
+              <a:t>because</a:t>
+            </a:r>
+            <a:r>
+              <a:rPr lang="fr-FR" sz="1100" dirty="0"/>
+              <a:t> the </a:t>
+            </a:r>
+            <a:r>
+              <a:rPr lang="fr-FR" sz="1100" dirty="0" err="1"/>
+              <a:t>ridership</a:t>
+            </a:r>
+            <a:r>
+              <a:rPr lang="fr-FR" sz="1100" dirty="0"/>
+              <a:t> </a:t>
+            </a:r>
+            <a:r>
+              <a:rPr lang="fr-FR" sz="1100" dirty="0" err="1"/>
+              <a:t>dataset</a:t>
+            </a:r>
+            <a:r>
+              <a:rPr lang="fr-FR" sz="1100" dirty="0"/>
+              <a:t> reports </a:t>
+            </a:r>
+            <a:r>
+              <a:rPr lang="fr-FR" sz="1100" dirty="0" err="1"/>
+              <a:t>passengers</a:t>
+            </a:r>
+            <a:r>
+              <a:rPr lang="fr-FR" sz="1100" dirty="0"/>
+              <a:t> at the </a:t>
+            </a:r>
+            <a:r>
+              <a:rPr lang="fr-FR" sz="1100" dirty="0" err="1"/>
+              <a:t>complex</a:t>
+            </a:r>
+            <a:r>
+              <a:rPr lang="fr-FR" sz="1100" dirty="0"/>
+              <a:t> </a:t>
+            </a:r>
+            <a:r>
+              <a:rPr lang="fr-FR" sz="1100" dirty="0" err="1"/>
+              <a:t>level</a:t>
+            </a:r>
+            <a:r>
+              <a:rPr lang="fr-FR" sz="1100" dirty="0"/>
+              <a:t>. </a:t>
+            </a:r>
+            <a:endParaRPr lang="en-US" sz="1100" dirty="0">
+              <a:ea typeface="+mn-lt"/>
+              <a:cs typeface="+mn-lt"/>
             </a:endParaRPr>
           </a:p>
         </p:txBody>
